--- a/docs/slides.pptx
+++ b/docs/slides.pptx
@@ -534,8 +534,8 @@
           <a:p>
             <a:r>
               <a:rPr lang="en-US" dirty="0"/>
-              <a:t>Walk through the agenda in under 60 seconds — don't read it out line by line. Just land the structure: two theory blocks, two exercises, the exercises are the point.
-Key message: "The theory gives you vocabulary for what you're about to do. You'll understand everything in the exercise because you just heard it."
+              <a:t>Walk through in under 60 seconds — don't read it line by line. Just land the structure.
+SAY: "Two theory blocks, two exercises. The theory gives you vocabulary for what you're about to do hands-on. You'll recognise everything in the exercise because you just heard it. The exercises are the point."
 Remind about Docker now if you haven't already. Anyone who hasn't pulled the repo needs to do it during the first theory block.</a:t>
             </a:r>
             <a:endParaRPr lang="en-US" dirty="0"/>
@@ -624,11 +624,11 @@
           <a:p>
             <a:r>
               <a:rPr lang="en-US" dirty="0"/>
-              <a:t>Read the JSON out loud and pause on `"password": "password123"`. Let the room react.
-This is embarrassing when it happens in production — and it happens more than you'd think. Common cause: a developer adds a field to debug, the PR reviewer misses it, it ships. It stays there for months. Then someone curls the endpoint and writes it up on Twitter.
-The pattern that prevents this: never return your JPA entity directly from a controller. Always map to a dedicated response DTO. The DTO is an explicit allowlist of what you're willing to share. If a field isn't in the DTO, it can't leak.
-In our API, `UserResponse` had `password` in it — participants will see this in Exercise 1, and they'll delete that one field in Fix 2.
-Real world: the Peloton API (2021) returned private user data — age, gender, city, workout history — to any authenticated user, no matter whose account it was. Classic DTO + IDOR combination.</a:t>
+              <a:t>Read the JSON on the slide out loud. Pause on "password": "password123".
+SAY: "That is the actual API response. Alice just fetched her own profile and got her plain-text password back in the JSON."
+Let the room react. This happens more than you'd think — a developer adds a field to debug, the PR reviewer misses it, it ships, stays there for months, then someone curls the endpoint and writes it up on Twitter.
+SAY: "The pattern that prevents this: never return your JPA entity directly from a controller. Always map to a dedicated response DTO. The DTO is an explicit allowlist of what you're willing to share. If a field isn't in the DTO, it can't leak."
+Real world: the Peloton API (2021) returned private user data — age, gender, city, workout history — to any authenticated user, no matter whose account it was. Classic DTO plus IDOR combination.</a:t>
             </a:r>
             <a:endParaRPr lang="en-US" dirty="0"/>
           </a:p>
@@ -716,11 +716,13 @@
           <a:p>
             <a:r>
               <a:rPr lang="en-US" dirty="0"/>
-              <a:t>"Table stakes" is intentional — call it out. This isn't Block 2 advanced stuff, it's the minimum bar for any production system.
-BCrypt cost factor 12: takes ~300ms to hash on modern hardware. Ask: "Doesn't that make login slow?" No — 300ms is imperceptible to a human. But for an attacker trying a billion passwords offline, 300ms × 1 billion = 9.5 years. The slowness is the whole point.
-MD5 and SHA-1 are instant — a modern GPU can test billions per second. A leaked MD5 password database is cracked in hours. BCrypt-12 takes years on the same hardware.
-Secrets in config: `.env` files or environment variables are the minimum for any team. For production, use HashiCorp Vault, AWS Secrets Manager, or GCP Secret Manager. "Never commit a secret to git — not even temporarily, not even in a private repo."
-The vulnerable API has `secret: secret123` in `application.yml` — committed to git, hardcoded, 9 characters. Participants crack it in Exercise 1 Challenge 7 in about 10 seconds.</a:t>
+              <a:t>SAY: "Table stakes. Not advanced. Not optional. The minimum bar for any production system."
+SAY: "BCrypt cost factor 12 takes about 300 milliseconds to hash on modern hardware. Doesn't that make login slow?"
+Pause.
+SAY: "300ms is imperceptible to a human. But for an attacker trying a billion passwords offline, that's 300ms times a billion — over 9 years. The slowness is the whole point."
+SAY: "MD5 and SHA-1 are instant — a modern GPU can test billions per second. A leaked MD5 database is cracked in hours. BCrypt-12 takes years on the same hardware."
+SAY: "And never commit a secret to git — not even temporarily, not even in a private repo."
+The vulnerable API has `secret: secret123` in `application.yml` — committed, hardcoded, 9 characters. Participants crack it in Exercise 1 in about 10 seconds.</a:t>
             </a:r>
             <a:endParaRPr lang="en-US" dirty="0"/>
           </a:p>
@@ -808,10 +810,10 @@
           <a:p>
             <a:r>
               <a:rPr lang="en-US" dirty="0"/>
-              <a:t>Do the check-in: "For each line — hands up if your current production API does this." Go through slowly. Watch for the lines where hands drop.
-Common gaps in the room: short-lived JWTs (most APIs use 24h), ownership checks (almost nobody checks every findById), response DTOs (lots of entity-returning controllers out there).
-Close the slide with: "The API you're about to break is missing all six of these. Your job is to find exactly where each one is missing."
-That's the bridge into the exercise. Move quickly to the break — energy is high, don't let it drop.</a:t>
+              <a:t>SAY: "For each line — hands up if your current production API does this."
+Go through slowly. Watch for the lines where hands drop. Common gaps: short-lived JWTs (most APIs use 24h), ownership checks on every findById, response DTOs instead of raw entities.
+SAY: "The API you're about to break is missing all six of these. Your job is to find exactly where each one is missing."
+Move quickly to the break — energy is high, don't let it drop.</a:t>
             </a:r>
             <a:endParaRPr lang="en-US" dirty="0"/>
           </a:p>
@@ -899,7 +901,8 @@
           <a:p>
             <a:r>
               <a:rPr lang="en-US" dirty="0"/>
-              <a:t>Short break — keep it tight. People are usually energised going into the first exercise.</a:t>
+              <a:t>Keep it tight. People are usually energised going into the first exercise.
+SAY: "See you back in 5."</a:t>
             </a:r>
             <a:endParaRPr lang="en-US" dirty="0"/>
           </a:p>
@@ -990,15 +993,17 @@
               <a:t>═══════════════════════════════════════════════════
      EXERCISE 1
 ══════════════════════════════════════════════════════
-Before releasing the room — do two requests live on the projector, it takes 60 seconds and sets the tone:
+Before releasing the room: do two requests live on the projector — takes 60 seconds and sets the tone.
 1. Run "Login as Alice" → show the token auto-saving in the collection variables panel.
-2. Run "🔥 IDOR – Alice reads Bob's account (id=2)" → show Bob's balance and full profile appearing. Pause. "Alice is logged in. She changed one digit in the URL. That's it."
-Then say: "Your turn. Open exercise-1-breaking-things.md and work through the challenges in order."
+2. Run "🔥 IDOR – Alice reads Bob's account (id=2)" → show Bob's balance appearing.
+SAY: "Alice is logged in. She changed one digit in the URL. That's it."
+Pause.
+SAY: "Your turn. Open exercise-1-breaking-things.md and work through the challenges in order."
 Facilitation notes:
-- Challenges 1–3 (IDOR) go quickly — most people finish in 10 minutes. That's fine, those are the ones that land the main point.
-- Challenge 4 (brute force) is slower because they need to hit the endpoint multiple times manually. Point them toward the Postman Runner if they want to automate it.
-- Challenge 5 (fake webhook) is usually the most surprising — "anyone can trigger a payment event?"
-- Challenges 6 (actuator) and 7 (JWT at jwt.io) are marked bonus. Point faster participants there.
+- Challenges 1–3 (IDOR) go quickly — most people finish in 10 minutes. Those are the ones that land the main point.
+- Challenge 4 (brute force) is slower — point them toward Postman Runner if they want to automate it.
+- Challenge 5 (fake webhook) is usually the most surprising one.
+- Challenges 6 and 7 are bonus for fast finishers.
 - Walk the room. Ask "what did you find?" rather than giving answers.</a:t>
             </a:r>
             <a:endParaRPr lang="en-US" dirty="0"/>
@@ -1087,8 +1092,9 @@
           <a:p>
             <a:r>
               <a:rPr lang="en-US" dirty="0"/>
-              <a:t>Hard stop. Use this quote as your closing line before people stand up — it reframes what they just did.
-Short break intentional: energy is high after the exercise, carry it into the debrief.</a:t>
+              <a:t>Say this before people stand up — it reframes what they just did.
+SAY: "Everything you just broke is because one of those 3 fundamentals was missing."
+Short break — energy is high after the exercise, carry it into the debrief.</a:t>
             </a:r>
             <a:endParaRPr lang="en-US" dirty="0"/>
           </a:p>
@@ -1177,9 +1183,9 @@
             <a:r>
               <a:rPr lang="en-US" dirty="0"/>
               <a:t>Walk the table row by row — one sentence each, fast. You're not explaining the vulnerabilities again, you're naming them collectively so the pattern is visible.
-After the table, pause and say: "Look at the root cause column. Missing check. Missing check. Missing check. No limiting. No verification. No auth. No auth. Weak secret. No auth."
-Land on: "None of these required a sophisticated attack. No zero-days. No exploit frameworks. Just knowing where to look and trying the obvious thing."
-That's the shift in mindset this course is trying to create. Let it sink in before moving to Block 2.</a:t>
+SAY: "Look at the root cause column. Missing check. Missing check. Missing check. No limiting. No verification. No auth. No auth. Weak secret. No auth."
+SAY: "None of these required a sophisticated attack. No zero-days. No exploit frameworks. Just knowing where to look and trying the obvious thing."
+Pause. Let it sink in. Then move to Block 2.</a:t>
             </a:r>
             <a:endParaRPr lang="en-US" dirty="0"/>
           </a:p>
@@ -1267,8 +1273,7 @@
           <a:p>
             <a:r>
               <a:rPr lang="en-US" dirty="0"/>
-              <a:t>Longest break of the day — intentional. People need to recharge before the 85-minute exercise.
-Use this time to reset the room: check that everyone has the repo open and can run the tests.</a:t>
+              <a:t>Longest break — intentional. People need to recharge before the 85-minute exercise. Use this time to check that everyone has the repo open and can run `./gradlew test`.</a:t>
             </a:r>
             <a:endParaRPr lang="en-US" dirty="0"/>
           </a:p>
@@ -1359,9 +1364,8 @@
               <a:t>═══════════════════════════════════════════════════
      BLOCK 2 — THEORY
 ══════════════════════════════════════════════════════
-Energy is usually lower coming back from the 20-minute break. Don't ease in — open with a strong line before you even click to the next slide.
-Try: "You just broke nine things in a running API. All of them without admin access. All of them in under 30 minutes. Block 2 is about making sure that never happens in your system."
-That reframes the break: it wasn't downtime, it was the moment between breaking and fixing.</a:t>
+Energy is usually lower coming back from the long break. Don't ease in — open with a strong line before clicking to the first slide.
+SAY: "You just broke nine things in a running API. All of them without admin access. All of them in under 30 minutes. Block 2 is about making sure that never happens in your system."</a:t>
             </a:r>
             <a:endParaRPr lang="en-US" dirty="0"/>
           </a:p>
@@ -1449,10 +1453,11 @@
           <a:p>
             <a:r>
               <a:rPr lang="en-US" dirty="0"/>
-              <a:t>Pause on the bullet list. Ask: "Has anyone here dealt with a scraper? A bot hammering a login endpoint? A partner that sent a malformed webhook payload that triggered something it shouldn't have?"
-Let someone share briefly — it makes the next slides feel like solutions to real problems rather than theoretical best practices.
-The framing shift to make explicit: Block 1 was about protecting your business logic (auth, validation, encryption). Block 2 is about surviving the internet — adversarial traffic that doesn't care about your logic at all.
-"The techniques in this block stop attacks before your code even runs. Not better code — a different layer of defence."</a:t>
+              <a:t>Pause on the bullet list.
+SAY: "Has anyone here dealt with a scraper? A bot hammering a login endpoint? A partner that sent a webhook payload that triggered something it shouldn't have?"
+Let someone share briefly — it makes the next slides feel like solutions to real problems rather than theory.
+SAY: "Block 1 was about protecting your business logic — auth, validation, encryption. Block 2 is about surviving the internet. Adversarial traffic that doesn't care about your logic at all."
+SAY: "The techniques in this block stop attacks before your code even runs. Not better code — a different layer of defence."</a:t>
             </a:r>
             <a:endParaRPr lang="en-US" dirty="0"/>
           </a:p>
@@ -1543,8 +1548,8 @@
               <a:t>═══════════════════════════════════════════════════
      BLOCK 1 — THEORY
 ══════════════════════════════════════════════════════
-Transition slide. Pause briefly. Let people settle after the agenda overview.
-One line to open: "Everything we cover in the next 30 minutes, you'll immediately prove in the exercise." That creates anticipation rather than passive listening.</a:t>
+Pause briefly. Let people settle.
+SAY: "Everything we cover in the next 30 minutes, you'll immediately prove in the exercise."</a:t>
             </a:r>
             <a:endParaRPr lang="en-US" dirty="0"/>
           </a:p>
@@ -1632,12 +1637,14 @@
           <a:p>
             <a:r>
               <a:rPr lang="en-US" dirty="0"/>
-              <a:t>If you have the API running locally: run the curl command live. No headers. Then say "this is what Exercise 2 will fix."
-HSTS: tells browsers to only use HTTPS — prevents SSL stripping attacks.
-X-Frame-Options: DENY prevents your app being embedded in an iframe on a malicious site (clickjacking).
-X-Content-Type-Options: nosniff stops browsers from guessing content types (MIME sniffing attacks).
-CSP: tells browsers which scripts/resources are allowed to run — stops injected scripts from untrusted CDNs.
-This is literally 5 lines of Spring Security config. The cost/benefit is enormous.</a:t>
+              <a:t>If the API is running locally: run the curl command live — no headers appear. Then:
+SAY: "This is what Exercise 2 will fix."
+Quick explanations as you point at each header on the slide:
+- HSTS tells browsers to only use HTTPS — prevents SSL stripping.
+- X-Frame-Options: DENY prevents clickjacking — your app embedded in an iframe on a malicious site.
+- X-Content-Type-Options: nosniff stops browsers guessing content types.
+- CSP tells browsers which scripts are allowed — stops injected scripts from compromised CDNs.
+SAY: "This is 5 lines of Spring Security config. The cost-to-benefit ratio is enormous."</a:t>
             </a:r>
             <a:endParaRPr lang="en-US" dirty="0"/>
           </a:p>
@@ -1725,11 +1732,15 @@
           <a:p>
             <a:r>
               <a:rPr lang="en-US" dirty="0"/>
-              <a:t>Do the 308 million calculation interactively: "26 to the power of 6 — who knows the answer?" Let someone shout it out. Then work through the time: at 100 req/s, that's 35 minutes for exhaustive search. A dictionary of the 10,000 most common passwords at 100 req/s = 100 seconds.
-"How hard is 100 req/s? You can do that with a curl loop on a laptop. A cheap VPS gets you 10,000 req/s."
-Endpoint-specific is the critical detail. A global rate limit of 1000 req/min doesn't help if all 1000 can be login attempts from the same IP. The login endpoint needs its own tight limit.
-Ask: "Does anyone know right now, without checking, whether their login endpoint is rate limited?" — usually silence, maybe one hand. "That's the answer to 'are we at risk.'"
-We use Bucket4j in the exercise — 5 attempts per minute per IP. That's enough to not annoy legitimate users but makes brute force computationally infeasible.</a:t>
+              <a:t>SAY: "26 to the power of 6 — who knows the answer?"
+Let someone shout it out. Then:
+SAY: "308 million combinations. At 100 requests per second — that's 35 minutes for exhaustive search. A dictionary of the 10,000 most common passwords at 100 req/s? 100 seconds."
+SAY: "How hard is 100 req/s? You can do that with a curl loop on a laptop. A cheap VPS gets you 10,000."
+Endpoint-specific is the critical detail. A global rate limit of 1000 req/min doesn't help if all 1000 can be login attempts from the same IP.
+SAY: "Does anyone know right now, without checking, whether their login endpoint is rate limited?"
+Wait. Usually silence, maybe one hand.
+SAY: "That's the answer to 'are we at risk.'"
+We use Bucket4j in the exercise — 5 attempts per minute per IP.</a:t>
             </a:r>
             <a:endParaRPr lang="en-US" dirty="0"/>
           </a:p>
@@ -1817,9 +1828,9 @@
           <a:p>
             <a:r>
               <a:rPr lang="en-US" dirty="0"/>
-              <a:t>The sneaky part: Postman ignores CORS entirely — it's a browser security mechanism. So you won't catch this in testing.
-It only manifests when a browser from evil-site.com makes a credentialed request to your API. The browser sends the user's cookies, your API accepts it, and the attacker's site reads the response.
-Real scenario: a user is logged into your app, visits evil-site.com, that page makes a fetch() to your API — with wildcard CORS and credentials enabled, it succeeds.</a:t>
+              <a:t>SAY: "The sneaky part: Postman ignores CORS entirely — it's a browser mechanism. So you won't catch this in testing."
+SAY: "It only bites you when a browser from evil-site.com makes a credentialed request to your API. The browser sends the user's cookies, your API accepts it because you allow all origins, and the attacker's site reads the response."
+SAY: "Real scenario: a user is logged into your app, they visit evil-site.com, that page makes a fetch to your API. With wildcard CORS and credentials enabled, it succeeds. The attacker's page has just read your user's data."</a:t>
             </a:r>
             <a:endParaRPr lang="en-US" dirty="0"/>
           </a:p>
@@ -1907,9 +1918,9 @@
           <a:p>
             <a:r>
               <a:rPr lang="en-US" dirty="0"/>
-              <a:t>The timing attack explanation is worth slowing down for. String.equals() short-circuits — it returns false the moment it finds a non-matching character. So comparing "sha256=aaaa" vs "sha256=baaa" returns faster than "sha256=aaaa" vs "sha256=aaab". An attacker can measure microsecond differences over thousands of requests and deduce the correct signature character by character.
-MessageDigest.isEqual() always compares ALL bytes regardless of where the mismatch is — constant time.
-GitHub, Stripe, and every major webhook provider use exactly this pattern.</a:t>
+              <a:t>Slow down for this one — it's the most surprising explanation of the day.
+SAY: "String.equals() short-circuits — it returns false the moment it finds a non-matching character. So comparing two signatures that differ in the first byte returns faster than two that differ in the last byte. An attacker can measure microsecond differences over thousands of requests and deduce the correct signature one character at a time."
+SAY: "MessageDigest.isEqual() always compares every byte, regardless of where the mismatch is. Constant time. GitHub, Stripe, and every major webhook provider use exactly this pattern."</a:t>
             </a:r>
             <a:endParaRPr lang="en-US" dirty="0"/>
           </a:p>
@@ -1997,9 +2008,9 @@
           <a:p>
             <a:r>
               <a:rPr lang="en-US" dirty="0"/>
-              <a:t>Same check-in as Block 1: "For each of these — hands up if your current production API has it." Go slowly. Watch for the rate limiting and security headers lines — those are usually the two where almost no hands go up.
-Close with: "You just broke this API in Exercise 1. Now you're the engineer who got paged at 2am because someone else did the same thing. Exercise 2 is your incident response."
-That framing makes the exercise feel urgent and real rather than an academic exercise.</a:t>
+              <a:t>SAY: "For each of these — hands up if your current production API has it."
+Go slowly. Rate limiting and security headers are usually the two where almost no hands go up.
+SAY: "You just broke this API in Exercise 1. Now you're the engineer who got paged at 2am because someone else did the same thing. Exercise 2 is your incident response."</a:t>
             </a:r>
             <a:endParaRPr lang="en-US" dirty="0"/>
           </a:p>
@@ -2090,14 +2101,14 @@
               <a:t>═══════════════════════════════════════════════════
      EXERCISE 2
 ══════════════════════════════════════════════════════
-Before releasing the room: "After each fix, run `./gradlew test` — you'll see the test go from red to green. That's your verification. If it's green, it works. No need to rebuild Docker just to check."
+SAY: "After each fix, run ./gradlew test. You'll see the test go from red to green. That's your verification. If it's green, it works — no need to rebuild Docker just to check."
 Facilitation notes:
-- Fix 1 (25 min): The IDOR fix is the core. If someone is stuck after 10 minutes, walk through 1a together on the projector, then let them do 1b and 1c independently — the pattern is identical.
-- Fix 2 (5 min): Easy win. If someone finishes Fix 1 early, nudge them straight to Fix 2 so they feel momentum.
-- Fix 3 (10 min): The most common stumble is missing imports. Remind the room to check the step 1 imports before the code block.
-- Fixes 4–8: These are "if time." Fast groups will get through all 8. Don't stress if slower groups only reach Fix 3 — they've fixed the most important vulnerabilities.
-- Pair faster and slower participants once you're in the last 20 minutes. Teaching a concept cements it.
-- For the HMAC constant-time comparison (Fix 5): if the room gets there, pause and walk through the timing attack explanation — it's the most memorable moment of the day.</a:t>
+- Fix 1 (25 min): The IDOR fix is the core. If someone is stuck after 10 minutes, walk through 1a on the projector, then let them do 1b and 1c independently — the pattern is identical.
+- Fix 2 (5 min): Easy win. Nudge early finishers here for momentum.
+- Fix 3 (10 min): The most common stumble is missing imports — remind the room to check Step 1 before the code block.
+- Fixes 4–8: "if time." Fast groups get through all 8. Don't stress if slower groups only reach Fix 3 — they've fixed the most critical vulnerabilities.
+- Pair faster and slower participants in the last 20 minutes.
+- Fix 5 (HMAC): If the room reaches it, pause and walk through the timing attack — it's the most memorable moment of the day.</a:t>
             </a:r>
             <a:endParaRPr lang="en-US" dirty="0"/>
           </a:p>
@@ -2185,9 +2196,12 @@
           <a:p>
             <a:r>
               <a:rPr lang="en-US" dirty="0"/>
-              <a:t>Walk the table fast — one sentence per row. Pause on BCrypt and rate limiting if the room hasn't done those yet; name them as "the ones to take home and implement on Monday."
-Land hard on the last line. Read it out. Pause. Then move to closing — don't rush this moment.
-The goal: participants should leave feeling like they did something real today, not attended a lecture.</a:t>
+              <a:t>Walk the table fast — one sentence per row.
+If the room hasn't reached BCrypt or rate limiting:
+SAY: "These last two — BCrypt and rate limiting — are the ones to take home and implement on Monday. Small changes, outsized impact."
+Then read the last line of the slide out loud and pause.
+SAY: "Every fix here is a production-ready pattern used in real systems. Not theoretical. Not best practices. Things that prevent real incidents."
+Pause. Don't rush it. Then move to the break.</a:t>
             </a:r>
             <a:endParaRPr lang="en-US" dirty="0"/>
           </a:p>
@@ -2275,7 +2289,7 @@
           <a:p>
             <a:r>
               <a:rPr lang="en-US" dirty="0"/>
-              <a:t>Final short break before key takeaways. Lets people decompress after the long exercise.
+              <a:t>SAY: "Last one. Back in 5."
 Use this time to pull up the closing slides and prepare for questions.</a:t>
             </a:r>
             <a:endParaRPr lang="en-US" dirty="0"/>
@@ -2454,10 +2468,11 @@
           <a:p>
             <a:r>
               <a:rPr lang="en-US" dirty="0"/>
-              <a:t>Read each row slowly. After Auth: "Not just 'does a token exist' — does this token belong to someone who's allowed to do this specific thing?"
-After Validation: "Every endpoint. Every input. Not just the ones that feel risky."
-After Encryption: "Not optional. Not 'we'll add it later.' This is the floor."
-"Non-negotiable" is the key word. Frame it as: you can ship without Layer 2 and be okay for a while. You cannot ship without Layer 1 and call it production-ready.</a:t>
+              <a:t>Read each row slowly, with a line after each.
+After Auth: SAY: "Not just 'does a token exist' — does this token belong to someone who's allowed to do this specific thing?"
+After Validation: SAY: "Every endpoint. Every input. Not just the ones that feel risky."
+After Encryption: SAY: "Not optional. Not 'we'll add it later.' This is the floor."
+SAY: "You can ship without Layer 2 and be okay for a while. You cannot ship without Layer 1 and call it production-ready."</a:t>
             </a:r>
             <a:endParaRPr lang="en-US" dirty="0"/>
           </a:p>
@@ -2545,10 +2560,10 @@
           <a:p>
             <a:r>
               <a:rPr lang="en-US" dirty="0"/>
-              <a:t>This is the thesis of the whole course. Read the quote out loud and pause after it — let it sit.
-Ask: "Who here has shipped something and called it 'secure' because it had a login page?" A few hands usually go up; some people laugh recognising themselves.
-The point: having a login page and enforcing authentication on every resource are different things. Most teams do the former and assume it implies the latter. Today they'll see exactly why it doesn't.
-Keep this slide to about 1 minute. The real content is in the next slides.</a:t>
+              <a:t>Read the quote on the slide out loud, then pause and let it sit.
+SAY: "Who here has shipped something and called it 'secure' because it had a login page?"
+A few hands usually go up; some nervous laughs. The point: having a login page and enforcing authentication on every resource are completely different things. Most teams do the former and assume it implies the latter. Today they'll see exactly why it doesn't.
+Keep this slide to about 1 minute.</a:t>
             </a:r>
             <a:endParaRPr lang="en-US" dirty="0"/>
           </a:p>
@@ -2636,10 +2651,9 @@
           <a:p>
             <a:r>
               <a:rPr lang="en-US" dirty="0"/>
-              <a:t>The framing here is important: "Your code can be perfect and you can still be exploited — because the threat isn't inside your logic, it's in the traffic pattern."
-Rate limiting stops brute force before authentication even runs. Security headers stop entire attack classes at the browser level. CORS stops cross-origin data theft without touching your endpoints. HMAC stops forged events at the network boundary.
-All four happen before your business logic executes. That's the point of this layer.
-After reading the table: "Both layers together — that's what a production-ready API looks like."</a:t>
+              <a:t>SAY: "Your code can be perfect and you can still be exploited — because the threat isn't inside your logic, it's in the traffic pattern."
+Rate limiting stops brute force before auth runs. Security headers stop attack classes at the browser. CORS stops cross-origin data theft. HMAC stops forged events at the boundary. All four before your code runs — that's the point of this layer.
+SAY: "Both layers together — that's what a production-ready API looks like."</a:t>
             </a:r>
             <a:endParaRPr lang="en-US" dirty="0"/>
           </a:p>
@@ -2727,9 +2741,9 @@
           <a:p>
             <a:r>
               <a:rPr lang="en-US" dirty="0"/>
-              <a:t>Read this slowly. Pause after "at scale."
-The mental model shift: most people imagine sophisticated hackers. Reality is scripts probing millions of APIs looking for these exact gaps. Automated, opportunistic, at scale.
-This is why fixing the basics matters more than advanced techniques.</a:t>
+              <a:t>Read the slide slowly. Pause after "at scale."
+SAY: "Most people imagine sophisticated hackers. The reality is scripts probing millions of APIs looking for these exact gaps. Automated, opportunistic, at scale."
+SAY: "This is why fixing the basics matters more than any advanced technique. You don't need perfect security. You need no obvious gaps."</a:t>
             </a:r>
             <a:endParaRPr lang="en-US" dirty="0"/>
           </a:p>
@@ -2817,8 +2831,9 @@
           <a:p>
             <a:r>
               <a:rPr lang="en-US" dirty="0"/>
-              <a:t>Ask 2–3 people to share which one they'll check first. Creates commitment, ends on energy.
-The `findById` search is particularly powerful — people can literally Ctrl+F their codebase right now on their laptop.</a:t>
+              <a:t>SAY: "Which of these will you check first? Turn to the person next to you and say it out loud."
+Give 30 seconds. Then ask 2–3 people to share. Creates commitment, ends on energy.
+The findById search is particularly powerful — people can Ctrl+F their codebase right now on their laptop.</a:t>
             </a:r>
             <a:endParaRPr lang="en-US" dirty="0"/>
           </a:p>
@@ -2906,12 +2921,13 @@
           <a:p>
             <a:r>
               <a:rPr lang="en-US" dirty="0"/>
-              <a:t>Common questions to prepare for:
-- "How do I convince my team to prioritise this?" → Frame it as risk, not best practice. IDOR is OWASP #1 for a reason.
-- "What about OAuth2 / Keycloak?" → Great for delegated auth. The ownership-check problem still exists behind it.
-- "Should we use an API Gateway for rate limiting?" → Yes, AND at the app level. Defense in depth.
-- "What about GraphQL / gRPC?" → Same principles apply. IDOR doesn't care about your protocol.
-Leave at least 10 minutes for questions. If the room is quiet, ask: "What was the most surprising thing you broke today?"</a:t>
+              <a:t>Leave at least 10 minutes for questions. If the room is quiet:
+SAY: "What was the most surprising thing you broke today?"
+Common questions to be ready for:
+- "How do I convince my team to prioritise this?" → SAY: "Frame it as risk, not best practice. IDOR is OWASP number 1 for a reason — it's what breaches actually look like."
+- "What about OAuth2 / Keycloak?" → SAY: "Great for delegated auth. The ownership-check problem still exists behind it — it tells you who the user is, not what they're allowed to see."
+- "Should we use an API Gateway for rate limiting?" → SAY: "Yes — and at the app level too. Defense in depth. If the gateway is misconfigured, the app catches it."
+- "What about GraphQL / gRPC?" → SAY: "Same principles apply. IDOR doesn't care about your protocol."</a:t>
             </a:r>
             <a:endParaRPr lang="en-US" dirty="0"/>
           </a:p>
@@ -2999,10 +3015,11 @@
           <a:p>
             <a:r>
               <a:rPr lang="en-US" dirty="0"/>
-              <a:t>Spend a moment on the authentication vs authorization distinction — many developers conflate them. Use the analogy: authentication is the bouncer checking your ID at the door; authorization is checking if you're on the VIP list once you're inside.
-The common failure: teams implement the JWT check (authentication) and assume it means users can only access their own data. It doesn't. The JWT only proves who you are — it says nothing about what you're allowed to see.
-On the JWT payload point: demonstrate this live if you can. Take Alice's token from Postman, go to jwt.io, paste it — the payload decodes instantly without knowing the secret. "Never put anything in here you wouldn't put on a billboard."
-Transition: "Let's look at exactly how this plays out in code."</a:t>
+              <a:t>SAY: "Authentication and authorization are not the same thing — and most bugs live in authorization. Authentication is the bouncer checking your ID at the door. Authorization is checking if you're on the VIP list once you're inside."
+The common failure: teams implement the JWT check and assume it means users can only access their own data. The JWT only proves who you are — it says nothing about what you're allowed to see.
+If the API is running: take Alice's token from Postman, go to jwt.io, paste it — the payload decodes instantly without knowing the secret.
+SAY: "Never put anything in the JWT payload you wouldn't put on a billboard."
+SAY: "Let's look at exactly how this plays out in code."</a:t>
             </a:r>
             <a:endParaRPr lang="en-US" dirty="0"/>
           </a:p>
@@ -3090,12 +3107,13 @@
           <a:p>
             <a:r>
               <a:rPr lang="en-US" dirty="0"/>
-              <a:t>Walk through the diagram slowly — trace the arrows. "Client logs in, gets two tokens. Uses the short-lived one for requests. When it expires, uses the refresh token to get a new access token."
-Key question to ask the room: "What happens if a token is stolen?" Let someone answer.
-With a 24h token and no refresh: the attacker has a full day, and you have no way to invalidate it — it's stateless.
-With 15min access + refresh rotation: stolen access token expires in 15 minutes. If the refresh token is stolen and used, the rotation means the original holder's next refresh fails — you detect the theft.
-The vulnerable API's secret is `secret123` — 9 characters, in plain text in application.yml. In Exercise 1, participants crack it in seconds at jwt.io. Ask: "How many of you have a JWT secret that's just a word or phrase?"
-Transition: "That secret problem is a symptom of a deeper issue — let's look at the authorization mistake underneath it."</a:t>
+              <a:t>Trace the arrows on the diagram as you talk.
+SAY: "Client logs in, gets two tokens. Uses the short-lived one for requests. When it expires, uses the refresh token to get a new access token."
+SAY: "What happens if a token is stolen?"
+Let someone answer. Then:
+SAY: "With a 24-hour token and no refresh, the attacker has a full day and you have no way to invalidate it — it's stateless. With 15-minute access tokens and refresh rotation, a stolen token expires in 15 minutes. And if the refresh token is stolen and used, the rotation means the original holder's next refresh fails — you detect the theft."
+SAY: "The vulnerable API's secret is 'secret123' — 9 characters, in plain text in application.yml. In Exercise 1, you'll crack it at jwt.io in about 10 seconds. How many of you have a JWT secret that's just a word or phrase?"
+SAY: "That secret problem is a symptom of a deeper issue — let's look at the authorization mistake underneath it."</a:t>
             </a:r>
             <a:endParaRPr lang="en-US" dirty="0"/>
           </a:p>
@@ -3183,9 +3201,13 @@
           <a:p>
             <a:r>
               <a:rPr lang="en-US" dirty="0"/>
-              <a:t>IDOR is OWASP API Security Top 10 #1 — the single most common real-world API vulnerability. Mention that: it's not a theoretical risk, it's what attackers actually look for first.
-Point at both code blocks together. "The controller gets an ID from the URL and passes it to the service. The service calls findById and returns whatever it finds. Where does it check that the caller is allowed to see this account?" Pause. "It doesn't."
-Ask: "How many of you have a `findById` call somewhere in your codebase without an ownership check right after it?" Let the hands go up. Let the moment land.
+              <a:t>IDOR is OWASP API Security Top 10 #1 — the most common real-world API vulnerability. Not theoretical. It's what attackers look for first.
+Point at both code blocks together.
+SAY: "The controller gets an ID from the URL and passes it to the service. The service calls findById and returns whatever it finds. Where does it check that the caller is allowed to see this account?"
+Pause.
+SAY: "It doesn't."
+SAY: "How many of you have a findById call somewhere in your codebase without an ownership check right after it?"
+Let the hands go up. Let the moment land.
 Real world: the Optus data breach (Australia, 2022) involved sequential customer IDs in an API — classic IDOR. 9.8 million records. The fix is the same one we're about to write.</a:t>
             </a:r>
             <a:endParaRPr lang="en-US" dirty="0"/>
@@ -3274,10 +3296,11 @@
           <a:p>
             <a:r>
               <a:rPr lang="en-US" dirty="0"/>
-              <a:t>Read the code out loud. "We accept a callerUsername, look up who they are, look up the account, compare owners, throw if they don't match."
-Key insight to emphasise: why the service layer specifically? Because the controller is not the only caller. Scheduled jobs, async event listeners, internal service-to-service calls — none of them go through the controller. If your check is in the controller, those paths bypass it entirely. The service layer is the only place that's always executed regardless of how it's invoked.
-This is also why testing the service in isolation is so valuable — the test proves the check is enforced without needing an HTTP request.
-Transition: "Let's look at the other two fundamentals quickly, then you'll break all of this yourself."</a:t>
+              <a:t>Read the code on the slide out loud.
+SAY: "We accept a callerUsername, look up the account, compare owners, throw if they don't match. That's it."
+SAY: "Why the service layer specifically? Because the controller is not the only caller. Scheduled jobs, async event listeners, internal service-to-service calls — none of them go through the controller. If your check is in the controller, those paths bypass it entirely. The service layer is the only place that always runs, no matter how it's invoked."
+Testing note for later: this is also why testing the service in isolation is so valuable — the test proves the check is enforced without needing an HTTP request.
+SAY: "Let's look at the other two fundamentals quickly, then you'll break all of this yourself."</a:t>
             </a:r>
             <a:endParaRPr lang="en-US" dirty="0"/>
           </a:p>
@@ -3365,10 +3388,11 @@
           <a:p>
             <a:r>
               <a:rPr lang="en-US" dirty="0"/>
-              <a:t>Repeat "Never trust input" out loud twice, then ask the room to say it with you once. Sounds corny — it sticks anyway.
-The list on the slide is deliberate. Most developers think of request bodies. They forget path variables (IDOR lives here), query parameters (injection lives here), headers (forgeable), and webhook payloads (that's what Exercise 1 Challenge 5 is about).
-Real example to share: path traversal — a path variable used to build a file path, unsanitised. An attacker sends `../../etc/passwd` as the ID. The server reads the system file and returns it. Simple, completely preventable, real.
-Another one: a `keyword` search parameter passed directly into a SQL LIKE clause. Even if parameterised, a wildcard-heavy query like `%a%a%a%a%` forces a full table scan on every character — ReDoS via the database. We have exactly this in the vulnerable API's search endpoint.</a:t>
+              <a:t>SAY: "Never. Trust. Input."
+Say it twice. Then ask the room to say it with you once — sounds corny, sticks anyway.
+The list is deliberate. Most developers think of request bodies. They forget path variables (IDOR lives here), query parameters (injection lives here), headers (forgeable), and webhook payloads.
+SAY: "Real example: path traversal. A path variable used to build a file path, unsanitised. An attacker sends ../../etc/passwd as the ID. The server reads the system file and returns it. Simple, completely preventable, real."
+SAY: "We also have a keyword search parameter in the vulnerable API that feeds directly into a SQL LIKE clause. You'll see that in Exercise 1, Challenge 3."</a:t>
             </a:r>
             <a:endParaRPr lang="en-US" dirty="0"/>
           </a:p>
@@ -3456,11 +3480,12 @@
           <a:p>
             <a:r>
               <a:rPr lang="en-US" dirty="0"/>
-              <a:t>Walk through the contrast. @NotBlank only checks that the string isn't empty — says nothing about what's in it.
-@Pattern rejects anything that isn't alphanumeric or standard punctuation. That single annotation blocks SQL injection characters, script tags, and path traversal attempts before they even reach your service.
-@DecimalMax — ask: "What happens if someone sends amount=999999999?" If there's no cap, a malicious transfer request could overflow balance fields. One annotation prevents it.
-The custom validator point: Bean Validation is for structural rules (format, length, range). Business rules — "you can't transfer more than your balance", "this username is already taken" — need a custom ConstraintValidator or explicit checks in the service layer.
-Keep this to 2 minutes — it's not the main event, it's vocabulary for the exercise.</a:t>
+              <a:t>Walk through the contrast on the slide.
+SAY: "@NotBlank only checks that the string isn't empty — it says nothing about what's in it."
+SAY: "@Pattern rejects anything that isn't alphanumeric or standard punctuation. That single annotation blocks SQL injection characters, script tags, and path traversal attempts before they reach your service."
+SAY: "What happens if someone sends amount=999999999? If there's no cap, a malicious transfer request could overflow balance fields. One annotation prevents it."
+Bean Validation is for structural rules — format, length, range. Business rules like "you can't transfer more than your balance" need explicit checks in the service layer.
+Keep this to 2 minutes — it's vocabulary for the exercise, not the main event.</a:t>
             </a:r>
             <a:endParaRPr lang="en-US" dirty="0"/>
           </a:p>
